--- a/stage2_intermediate/03_clustering_anomaly/Lecture-8-Clustering-Anomaly-Detection.pptx
+++ b/stage2_intermediate/03_clustering_anomaly/Lecture-8-Clustering-Anomaly-Detection.pptx
@@ -8311,6 +8311,9 @@
           <a:lstStyle/>
           <a:p>
             <a:r>
+              <a:rPr>
+                <a:latin typeface="Calibri"/>
+              </a:rPr>
               <a:t>AI Basic Training</a:t>
             </a:r>
           </a:p>
@@ -8332,6 +8335,9 @@
           <a:lstStyle/>
           <a:p>
             <a:r>
+              <a:rPr>
+                <a:latin typeface="Calibri"/>
+              </a:rPr>
               <a:t>Lesson 2.3  |  Stage 2: Intermediate ML</a:t>
             </a:r>
           </a:p>
@@ -8353,6 +8359,9 @@
           <a:lstStyle/>
           <a:p>
             <a:r>
+              <a:rPr b="1">
+                <a:latin typeface="Calibri"/>
+              </a:rPr>
               <a:t>Clustering &amp; Anomaly Detection</a:t>
             </a:r>
           </a:p>
@@ -8374,6 +8383,9 @@
           <a:lstStyle/>
           <a:p>
             <a:r>
+              <a:rPr>
+                <a:latin typeface="Calibri"/>
+              </a:rPr>
               <a:t>Finding Threats Without Labels  -  Unsupervised Learning</a:t>
             </a:r>
           </a:p>
@@ -8413,6 +8425,9 @@
           <a:lstStyle/>
           <a:p>
             <a:r>
+              <a:rPr b="1">
+                <a:latin typeface="Calibri"/>
+              </a:rPr>
               <a:t>The Elbow Method: Where Does Adding Clusters Stop Helping?</a:t>
             </a:r>
           </a:p>
@@ -8476,6 +8491,9 @@
           <a:lstStyle/>
           <a:p>
             <a:r>
+              <a:rPr b="1">
+                <a:latin typeface="Calibri"/>
+              </a:rPr>
               <a:t>Interpreting the Elbow Plot</a:t>
             </a:r>
           </a:p>
@@ -8497,49 +8515,65 @@
           <a:lstStyle/>
           <a:p>
             <a:r>
-              <a:rPr sz="1400"/>
+              <a:rPr sz="1400">
+                <a:latin typeface="Calibri"/>
+              </a:rPr>
               <a:t>Inertia = sum of squared</a:t>
             </a:r>
           </a:p>
           <a:p>
             <a:r>
-              <a:rPr sz="1400"/>
+              <a:rPr sz="1400">
+                <a:latin typeface="Calibri"/>
+              </a:rPr>
               <a:t>  distances to nearest centroid</a:t>
             </a:r>
           </a:p>
           <a:p>
             <a:r>
-              <a:rPr sz="1400"/>
+              <a:rPr sz="1400">
+                <a:latin typeface="Calibri"/>
+              </a:rPr>
               <a:t/>
             </a:r>
           </a:p>
           <a:p>
             <a:r>
-              <a:rPr sz="1400"/>
+              <a:rPr sz="1400">
+                <a:latin typeface="Calibri"/>
+              </a:rPr>
               <a:t>Lower inertia = tighter clusters</a:t>
             </a:r>
           </a:p>
           <a:p>
             <a:r>
-              <a:rPr sz="1400"/>
+              <a:rPr sz="1400">
+                <a:latin typeface="Calibri"/>
+              </a:rPr>
               <a:t/>
             </a:r>
           </a:p>
           <a:p>
             <a:r>
-              <a:rPr sz="1400"/>
+              <a:rPr sz="1400">
+                <a:latin typeface="Calibri"/>
+              </a:rPr>
               <a:t>The 'elbow' is where adding</a:t>
             </a:r>
           </a:p>
           <a:p>
             <a:r>
-              <a:rPr sz="1400"/>
+              <a:rPr sz="1400">
+                <a:latin typeface="Calibri"/>
+              </a:rPr>
               <a:t>more clusters gives diminishing</a:t>
             </a:r>
           </a:p>
           <a:p>
             <a:r>
-              <a:rPr sz="1400"/>
+              <a:rPr sz="1400">
+                <a:latin typeface="Calibri"/>
+              </a:rPr>
               <a:t>returns</a:t>
             </a:r>
           </a:p>
@@ -8561,55 +8595,73 @@
           <a:lstStyle/>
           <a:p>
             <a:r>
-              <a:rPr sz="1400"/>
+              <a:rPr sz="1400">
+                <a:latin typeface="Calibri"/>
+              </a:rPr>
               <a:t>Also consider:</a:t>
             </a:r>
           </a:p>
           <a:p>
             <a:r>
-              <a:rPr sz="1400"/>
+              <a:rPr sz="1400">
+                <a:latin typeface="Calibri"/>
+              </a:rPr>
               <a:t/>
             </a:r>
           </a:p>
           <a:p>
             <a:r>
-              <a:rPr sz="1400"/>
+              <a:rPr sz="1400">
+                <a:latin typeface="Calibri"/>
+              </a:rPr>
               <a:t>Silhouette score</a:t>
             </a:r>
           </a:p>
           <a:p>
             <a:r>
-              <a:rPr sz="1400"/>
+              <a:rPr sz="1400">
+                <a:latin typeface="Calibri"/>
+              </a:rPr>
               <a:t>  How well-separated are clusters?</a:t>
             </a:r>
           </a:p>
           <a:p>
             <a:r>
-              <a:rPr sz="1400"/>
+              <a:rPr sz="1400">
+                <a:latin typeface="Calibri"/>
+              </a:rPr>
               <a:t>  Range: -1 to 1 (higher = better)</a:t>
             </a:r>
           </a:p>
           <a:p>
             <a:r>
-              <a:rPr sz="1400"/>
+              <a:rPr sz="1400">
+                <a:latin typeface="Calibri"/>
+              </a:rPr>
               <a:t/>
             </a:r>
           </a:p>
           <a:p>
             <a:r>
-              <a:rPr sz="1400"/>
+              <a:rPr sz="1400">
+                <a:latin typeface="Calibri"/>
+              </a:rPr>
               <a:t>Domain knowledge</a:t>
             </a:r>
           </a:p>
           <a:p>
             <a:r>
-              <a:rPr sz="1400"/>
+              <a:rPr sz="1400">
+                <a:latin typeface="Calibri"/>
+              </a:rPr>
               <a:t>  Does the number of clusters</a:t>
             </a:r>
           </a:p>
           <a:p>
             <a:r>
-              <a:rPr sz="1400"/>
+              <a:rPr sz="1400">
+                <a:latin typeface="Calibri"/>
+              </a:rPr>
               <a:t>  make sense for your network?</a:t>
             </a:r>
           </a:p>
@@ -8649,11 +8701,17 @@
           <a:lstStyle/>
           <a:p>
             <a:r>
+              <a:rPr b="1">
+                <a:latin typeface="Calibri"/>
+              </a:rPr>
               <a:t>Anomaly Detection</a:t>
             </a:r>
           </a:p>
           <a:p>
             <a:r>
+              <a:rPr b="1">
+                <a:latin typeface="Calibri"/>
+              </a:rPr>
               <a:t>via Distance</a:t>
             </a:r>
           </a:p>
@@ -8675,6 +8733,9 @@
           <a:lstStyle/>
           <a:p>
             <a:r>
+              <a:rPr b="1">
+                <a:latin typeface="Calibri"/>
+              </a:rPr>
               <a:t>04</a:t>
             </a:r>
           </a:p>
@@ -8714,6 +8775,9 @@
           <a:lstStyle/>
           <a:p>
             <a:r>
+              <a:rPr b="1">
+                <a:latin typeface="Calibri"/>
+              </a:rPr>
               <a:t>Flagging Anomalies by Distance from Centroids</a:t>
             </a:r>
           </a:p>
@@ -8777,6 +8841,9 @@
           <a:lstStyle/>
           <a:p>
             <a:r>
+              <a:rPr b="1">
+                <a:latin typeface="Calibri"/>
+              </a:rPr>
               <a:t>The Anomaly Detection Pipeline</a:t>
             </a:r>
           </a:p>
@@ -8798,61 +8865,81 @@
           <a:lstStyle/>
           <a:p>
             <a:r>
-              <a:rPr sz="1500"/>
+              <a:rPr sz="1500">
+                <a:latin typeface="Calibri"/>
+              </a:rPr>
               <a:t>1. Fit k-Means on baseline (known-good) traffic</a:t>
             </a:r>
           </a:p>
           <a:p>
             <a:r>
-              <a:rPr sz="1500"/>
+              <a:rPr sz="1500">
+                <a:latin typeface="Calibri"/>
+              </a:rPr>
               <a:t>2. For each new connection:</a:t>
             </a:r>
           </a:p>
           <a:p>
             <a:r>
-              <a:rPr sz="1500"/>
+              <a:rPr sz="1500">
+                <a:latin typeface="Calibri"/>
+              </a:rPr>
               <a:t>   distance = min distance to any centroid</a:t>
             </a:r>
           </a:p>
           <a:p>
             <a:r>
-              <a:rPr sz="1500"/>
+              <a:rPr sz="1500">
+                <a:latin typeface="Calibri"/>
+              </a:rPr>
               <a:t>3. If distance &gt; threshold: FLAG as anomalous</a:t>
             </a:r>
           </a:p>
           <a:p>
             <a:r>
-              <a:rPr sz="1500"/>
+              <a:rPr sz="1500">
+                <a:latin typeface="Calibri"/>
+              </a:rPr>
               <a:t/>
             </a:r>
           </a:p>
           <a:p>
             <a:r>
-              <a:rPr sz="1500"/>
+              <a:rPr sz="1500">
+                <a:latin typeface="Calibri"/>
+              </a:rPr>
               <a:t>distances = km.transform(X_new).min(axis=1)</a:t>
             </a:r>
           </a:p>
           <a:p>
             <a:r>
-              <a:rPr sz="1500"/>
+              <a:rPr sz="1500">
+                <a:latin typeface="Calibri"/>
+              </a:rPr>
               <a:t>anomalies = X_new[distances &gt; threshold]</a:t>
             </a:r>
           </a:p>
           <a:p>
             <a:r>
-              <a:rPr sz="1500"/>
+              <a:rPr sz="1500">
+                <a:latin typeface="Calibri"/>
+              </a:rPr>
               <a:t/>
             </a:r>
           </a:p>
           <a:p>
             <a:r>
-              <a:rPr sz="1500"/>
+              <a:rPr sz="1500">
+                <a:latin typeface="Calibri"/>
+              </a:rPr>
               <a:t>Critical: always StandardScaler before clustering</a:t>
             </a:r>
           </a:p>
           <a:p>
             <a:r>
-              <a:rPr sz="1500"/>
+              <a:rPr sz="1500">
+                <a:latin typeface="Calibri"/>
+              </a:rPr>
               <a:t>  (bytes_sent 0-1M vs duration 0-300 would break distances)</a:t>
             </a:r>
           </a:p>
@@ -8892,11 +8979,17 @@
           <a:lstStyle/>
           <a:p>
             <a:r>
+              <a:rPr b="1">
+                <a:latin typeface="Calibri"/>
+              </a:rPr>
               <a:t>Workshop</a:t>
             </a:r>
           </a:p>
           <a:p>
             <a:r>
+              <a:rPr b="1">
+                <a:latin typeface="Calibri"/>
+              </a:rPr>
               <a:t>and Next Steps</a:t>
             </a:r>
           </a:p>
@@ -8918,6 +9011,9 @@
           <a:lstStyle/>
           <a:p>
             <a:r>
+              <a:rPr b="1">
+                <a:latin typeface="Calibri"/>
+              </a:rPr>
               <a:t>05</a:t>
             </a:r>
           </a:p>
@@ -8957,6 +9053,9 @@
           <a:lstStyle/>
           <a:p>
             <a:r>
+              <a:rPr b="1">
+                <a:latin typeface="Calibri"/>
+              </a:rPr>
               <a:t>Workshop: 4 Hands-On Exercises</a:t>
             </a:r>
           </a:p>
@@ -8978,37 +9077,49 @@
           <a:lstStyle/>
           <a:p>
             <a:r>
-              <a:rPr sz="1600"/>
+              <a:rPr sz="1600">
+                <a:latin typeface="Calibri"/>
+              </a:rPr>
               <a:t>Exercise 1:  Unsupervised framing - no labels, what can clustering find?</a:t>
             </a:r>
           </a:p>
           <a:p>
             <a:r>
-              <a:rPr sz="1600"/>
+              <a:rPr sz="1600">
+                <a:latin typeface="Calibri"/>
+              </a:rPr>
               <a:t>Exercise 2:  k-Means + PCA visualisation - colour-coded 2D cluster plot</a:t>
             </a:r>
           </a:p>
           <a:p>
             <a:r>
-              <a:rPr sz="1600"/>
+              <a:rPr sz="1600">
+                <a:latin typeface="Calibri"/>
+              </a:rPr>
               <a:t>Exercise 3:  Choosing k - elbow method, silhouette score</a:t>
             </a:r>
           </a:p>
           <a:p>
             <a:r>
-              <a:rPr sz="1600"/>
+              <a:rPr sz="1600">
+                <a:latin typeface="Calibri"/>
+              </a:rPr>
               <a:t>Exercise 4:  Anomaly scoring - distance thresholds, flag top anomalies</a:t>
             </a:r>
           </a:p>
           <a:p>
             <a:r>
-              <a:rPr sz="1600"/>
+              <a:rPr sz="1600">
+                <a:latin typeface="Calibri"/>
+              </a:rPr>
               <a:t/>
             </a:r>
           </a:p>
           <a:p>
             <a:r>
-              <a:rPr sz="1600"/>
+              <a:rPr sz="1600">
+                <a:latin typeface="Calibri"/>
+              </a:rPr>
               <a:t>Each exercise: lecture.md + handson.md + solution file</a:t>
             </a:r>
           </a:p>
@@ -9048,37 +9159,49 @@
           <a:lstStyle/>
           <a:p>
             <a:r>
-              <a:rPr sz="1500"/>
+              <a:rPr sz="1500">
+                <a:latin typeface="Calibri"/>
+              </a:rPr>
               <a:t>Unsupervised learning finds structure without labels - essential for security</a:t>
             </a:r>
           </a:p>
           <a:p>
             <a:r>
-              <a:rPr sz="1500"/>
+              <a:rPr sz="1500">
+                <a:latin typeface="Calibri"/>
+              </a:rPr>
               <a:t>k-Means groups similar points into k clusters via iterative centroid updates</a:t>
             </a:r>
           </a:p>
           <a:p>
             <a:r>
-              <a:rPr sz="1500"/>
+              <a:rPr sz="1500">
+                <a:latin typeface="Calibri"/>
+              </a:rPr>
               <a:t>The elbow method helps choose k - look for diminishing returns</a:t>
             </a:r>
           </a:p>
           <a:p>
             <a:r>
-              <a:rPr sz="1500"/>
+              <a:rPr sz="1500">
+                <a:latin typeface="Calibri"/>
+              </a:rPr>
               <a:t>Anomalies = points far from all centroids (high distance score)</a:t>
             </a:r>
           </a:p>
           <a:p>
             <a:r>
-              <a:rPr sz="1500"/>
+              <a:rPr sz="1500">
+                <a:latin typeface="Calibri"/>
+              </a:rPr>
               <a:t>Always scale features before clustering - Euclidean distance requires it</a:t>
             </a:r>
           </a:p>
           <a:p>
             <a:r>
-              <a:rPr sz="1500"/>
+              <a:rPr sz="1500">
+                <a:latin typeface="Calibri"/>
+              </a:rPr>
               <a:t>Next: Cross-Validation - how to know if your model truly generalises</a:t>
             </a:r>
           </a:p>
@@ -9100,11 +9223,17 @@
           <a:lstStyle/>
           <a:p>
             <a:r>
+              <a:rPr b="1">
+                <a:latin typeface="Calibri"/>
+              </a:rPr>
               <a:t>Key</a:t>
             </a:r>
           </a:p>
           <a:p>
             <a:r>
+              <a:rPr b="1">
+                <a:latin typeface="Calibri"/>
+              </a:rPr>
               <a:t>Takeaways</a:t>
             </a:r>
           </a:p>
@@ -9144,6 +9273,9 @@
           <a:lstStyle/>
           <a:p>
             <a:r>
+              <a:rPr>
+                <a:latin typeface="Calibri"/>
+              </a:rPr>
               <a:t>Next:  Lesson 2.4 - Cross-Validation and Overfitting</a:t>
             </a:r>
           </a:p>
@@ -9165,6 +9297,9 @@
           <a:lstStyle/>
           <a:p>
             <a:r>
+              <a:rPr b="1">
+                <a:latin typeface="Calibri"/>
+              </a:rPr>
               <a:t>Clustering &amp; Anomaly Detection</a:t>
             </a:r>
           </a:p>
@@ -9204,31 +9339,41 @@
           <a:lstStyle/>
           <a:p>
             <a:r>
-              <a:rPr sz="1600"/>
+              <a:rPr sz="1600">
+                <a:latin typeface="Calibri"/>
+              </a:rPr>
               <a:t>Supervised vs unsupervised - what if you have no labels?</a:t>
             </a:r>
           </a:p>
           <a:p>
             <a:r>
-              <a:rPr sz="1600"/>
+              <a:rPr sz="1600">
+                <a:latin typeface="Calibri"/>
+              </a:rPr>
               <a:t>How k-Means clustering works - step by step</a:t>
             </a:r>
           </a:p>
           <a:p>
             <a:r>
-              <a:rPr sz="1600"/>
+              <a:rPr sz="1600">
+                <a:latin typeface="Calibri"/>
+              </a:rPr>
               <a:t>Choosing k with the elbow method</a:t>
             </a:r>
           </a:p>
           <a:p>
             <a:r>
-              <a:rPr sz="1600"/>
+              <a:rPr sz="1600">
+                <a:latin typeface="Calibri"/>
+              </a:rPr>
               <a:t>Anomaly detection via centroid distance</a:t>
             </a:r>
           </a:p>
           <a:p>
             <a:r>
-              <a:rPr sz="1600"/>
+              <a:rPr sz="1600">
+                <a:latin typeface="Calibri"/>
+              </a:rPr>
               <a:t>Scaling and practical considerations</a:t>
             </a:r>
           </a:p>
@@ -9250,6 +9395,9 @@
           <a:lstStyle/>
           <a:p>
             <a:r>
+              <a:rPr b="1">
+                <a:latin typeface="Calibri"/>
+              </a:rPr>
               <a:t>What We'll Cover</a:t>
             </a:r>
           </a:p>
@@ -9289,11 +9437,17 @@
           <a:lstStyle/>
           <a:p>
             <a:r>
+              <a:rPr b="1">
+                <a:latin typeface="Calibri"/>
+              </a:rPr>
               <a:t>The Unsupervised</a:t>
             </a:r>
           </a:p>
           <a:p>
             <a:r>
+              <a:rPr b="1">
+                <a:latin typeface="Calibri"/>
+              </a:rPr>
               <a:t>Problem</a:t>
             </a:r>
           </a:p>
@@ -9315,6 +9469,9 @@
           <a:lstStyle/>
           <a:p>
             <a:r>
+              <a:rPr b="1">
+                <a:latin typeface="Calibri"/>
+              </a:rPr>
               <a:t>01</a:t>
             </a:r>
           </a:p>
@@ -9354,6 +9511,9 @@
           <a:lstStyle/>
           <a:p>
             <a:r>
+              <a:rPr b="1">
+                <a:latin typeface="Calibri"/>
+              </a:rPr>
               <a:t>Supervised vs Unsupervised Learning</a:t>
             </a:r>
           </a:p>
@@ -9417,6 +9577,9 @@
           <a:lstStyle/>
           <a:p>
             <a:r>
+              <a:rPr>
+                <a:latin typeface="Calibri"/>
+              </a:rPr>
               <a:t/>
             </a:r>
           </a:p>
@@ -9438,37 +9601,49 @@
           <a:lstStyle/>
           <a:p>
             <a:r>
-              <a:rPr sz="1400"/>
+              <a:rPr sz="1400">
+                <a:latin typeface="Calibri"/>
+              </a:rPr>
               <a:t>I don't need to know what</a:t>
             </a:r>
           </a:p>
           <a:p>
             <a:r>
-              <a:rPr sz="1400"/>
+              <a:rPr sz="1400">
+                <a:latin typeface="Calibri"/>
+              </a:rPr>
               <a:t>an attack looks like.</a:t>
             </a:r>
           </a:p>
           <a:p>
             <a:r>
-              <a:rPr sz="1400"/>
+              <a:rPr sz="1400">
+                <a:latin typeface="Calibri"/>
+              </a:rPr>
               <a:t/>
             </a:r>
           </a:p>
           <a:p>
             <a:r>
-              <a:rPr sz="1400"/>
+              <a:rPr sz="1400">
+                <a:latin typeface="Calibri"/>
+              </a:rPr>
               <a:t>I just need to know when</a:t>
             </a:r>
           </a:p>
           <a:p>
             <a:r>
-              <a:rPr sz="1400"/>
+              <a:rPr sz="1400">
+                <a:latin typeface="Calibri"/>
+              </a:rPr>
               <a:t>something looks different</a:t>
             </a:r>
           </a:p>
           <a:p>
             <a:r>
-              <a:rPr sz="1400"/>
+              <a:rPr sz="1400">
+                <a:latin typeface="Calibri"/>
+              </a:rPr>
               <a:t>from normal.</a:t>
             </a:r>
           </a:p>
@@ -9490,6 +9665,9 @@
           <a:lstStyle/>
           <a:p>
             <a:r>
+              <a:rPr b="1">
+                <a:latin typeface="Calibri"/>
+              </a:rPr>
               <a:t>Why Unsupervised Matters for Security</a:t>
             </a:r>
           </a:p>
@@ -9511,43 +9689,57 @@
           <a:lstStyle/>
           <a:p>
             <a:r>
-              <a:rPr sz="1400"/>
+              <a:rPr sz="1400">
+                <a:latin typeface="Calibri"/>
+              </a:rPr>
               <a:t>You almost never have perfect labels</a:t>
             </a:r>
           </a:p>
           <a:p>
             <a:r>
-              <a:rPr sz="1400"/>
+              <a:rPr sz="1400">
+                <a:latin typeface="Calibri"/>
+              </a:rPr>
               <a:t>  No one hand-labels every firewall connection</a:t>
             </a:r>
           </a:p>
           <a:p>
             <a:r>
-              <a:rPr sz="1400"/>
+              <a:rPr sz="1400">
+                <a:latin typeface="Calibri"/>
+              </a:rPr>
               <a:t/>
             </a:r>
           </a:p>
           <a:p>
             <a:r>
-              <a:rPr sz="1400"/>
+              <a:rPr sz="1400">
+                <a:latin typeface="Calibri"/>
+              </a:rPr>
               <a:t>k-Means can:</a:t>
             </a:r>
           </a:p>
           <a:p>
             <a:r>
-              <a:rPr sz="1400"/>
+              <a:rPr sz="1400">
+                <a:latin typeface="Calibri"/>
+              </a:rPr>
               <a:t>  Find behavioural clusters (users, servers, IoT)</a:t>
             </a:r>
           </a:p>
           <a:p>
             <a:r>
-              <a:rPr sz="1400"/>
+              <a:rPr sz="1400">
+                <a:latin typeface="Calibri"/>
+              </a:rPr>
               <a:t>  Flag outliers (anomalous connections)</a:t>
             </a:r>
           </a:p>
           <a:p>
             <a:r>
-              <a:rPr sz="1400"/>
+              <a:rPr sz="1400">
+                <a:latin typeface="Calibri"/>
+              </a:rPr>
               <a:t>  Baseline normal without a single label</a:t>
             </a:r>
           </a:p>
@@ -9587,11 +9779,17 @@
           <a:lstStyle/>
           <a:p>
             <a:r>
+              <a:rPr b="1">
+                <a:latin typeface="Calibri"/>
+              </a:rPr>
               <a:t>How k-Means</a:t>
             </a:r>
           </a:p>
           <a:p>
             <a:r>
+              <a:rPr b="1">
+                <a:latin typeface="Calibri"/>
+              </a:rPr>
               <a:t>Works</a:t>
             </a:r>
           </a:p>
@@ -9613,6 +9811,9 @@
           <a:lstStyle/>
           <a:p>
             <a:r>
+              <a:rPr b="1">
+                <a:latin typeface="Calibri"/>
+              </a:rPr>
               <a:t>02</a:t>
             </a:r>
           </a:p>
@@ -9652,6 +9853,9 @@
           <a:lstStyle/>
           <a:p>
             <a:r>
+              <a:rPr b="1">
+                <a:latin typeface="Calibri"/>
+              </a:rPr>
               <a:t>The k-Means Algorithm in Four Steps</a:t>
             </a:r>
           </a:p>
@@ -9715,6 +9919,9 @@
           <a:lstStyle/>
           <a:p>
             <a:r>
+              <a:rPr b="1">
+                <a:latin typeface="Calibri"/>
+              </a:rPr>
               <a:t>The Algorithm</a:t>
             </a:r>
           </a:p>
@@ -9736,49 +9943,65 @@
           <a:lstStyle/>
           <a:p>
             <a:r>
-              <a:rPr sz="1500"/>
+              <a:rPr sz="1500">
+                <a:latin typeface="Calibri"/>
+              </a:rPr>
               <a:t>1.  Choose k (number of clusters)</a:t>
             </a:r>
           </a:p>
           <a:p>
             <a:r>
-              <a:rPr sz="1500"/>
+              <a:rPr sz="1500">
+                <a:latin typeface="Calibri"/>
+              </a:rPr>
               <a:t>2.  Place k centroids randomly</a:t>
             </a:r>
           </a:p>
           <a:p>
             <a:r>
-              <a:rPr sz="1500"/>
+              <a:rPr sz="1500">
+                <a:latin typeface="Calibri"/>
+              </a:rPr>
               <a:t>3.  Assign each point to its nearest centroid</a:t>
             </a:r>
           </a:p>
           <a:p>
             <a:r>
-              <a:rPr sz="1500"/>
+              <a:rPr sz="1500">
+                <a:latin typeface="Calibri"/>
+              </a:rPr>
               <a:t>4.  Move each centroid to the mean of its assigned points</a:t>
             </a:r>
           </a:p>
           <a:p>
             <a:r>
-              <a:rPr sz="1500"/>
+              <a:rPr sz="1500">
+                <a:latin typeface="Calibri"/>
+              </a:rPr>
               <a:t>5.  Repeat steps 3-4 until assignments stop changing</a:t>
             </a:r>
           </a:p>
           <a:p>
             <a:r>
-              <a:rPr sz="1500"/>
+              <a:rPr sz="1500">
+                <a:latin typeface="Calibri"/>
+              </a:rPr>
               <a:t/>
             </a:r>
           </a:p>
           <a:p>
             <a:r>
-              <a:rPr sz="1500"/>
+              <a:rPr sz="1500">
+                <a:latin typeface="Calibri"/>
+              </a:rPr>
               <a:t>Converges in ~10-20 iterations for most datasets</a:t>
             </a:r>
           </a:p>
           <a:p>
             <a:r>
-              <a:rPr sz="1500"/>
+              <a:rPr sz="1500">
+                <a:latin typeface="Calibri"/>
+              </a:rPr>
               <a:t>Uses Euclidean distance - features MUST be scaled first</a:t>
             </a:r>
           </a:p>
@@ -9818,6 +10041,9 @@
           <a:lstStyle/>
           <a:p>
             <a:r>
+              <a:rPr b="1">
+                <a:latin typeface="Calibri"/>
+              </a:rPr>
               <a:t>Choosing k</a:t>
             </a:r>
           </a:p>
@@ -9839,6 +10065,9 @@
           <a:lstStyle/>
           <a:p>
             <a:r>
+              <a:rPr b="1">
+                <a:latin typeface="Calibri"/>
+              </a:rPr>
               <a:t>03</a:t>
             </a:r>
           </a:p>
